--- a/Artifacts/SM _ Deisgn ppt.pptx
+++ b/Artifacts/SM _ Deisgn ppt.pptx
@@ -7,9 +7,11 @@
   </p:sldMasterIdLst>
   <p:sldIdLst>
     <p:sldId id="256" r:id="rId3"/>
-    <p:sldId id="257" r:id="rId4"/>
-    <p:sldId id="258" r:id="rId5"/>
-    <p:sldId id="259" r:id="rId6"/>
+    <p:sldId id="260" r:id="rId4"/>
+    <p:sldId id="257" r:id="rId5"/>
+    <p:sldId id="261" r:id="rId6"/>
+    <p:sldId id="258" r:id="rId7"/>
+    <p:sldId id="259" r:id="rId8"/>
   </p:sldIdLst>
   <p:sldSz cx="12192000" cy="6858000"/>
   <p:notesSz cx="6858000" cy="9144000"/>
@@ -247,7 +249,7 @@
           <a:p>
             <a:fld id="{CE28ABBB-BC92-436B-86C2-593EDF46E0C9}" type="datetimeFigureOut">
               <a:rPr lang="en-IN" smtClean="0"/>
-              <a:t>12-01-2026</a:t>
+              <a:t>13-01-2026</a:t>
             </a:fld>
             <a:endParaRPr lang="en-IN"/>
           </a:p>
@@ -417,7 +419,7 @@
           <a:p>
             <a:fld id="{CE28ABBB-BC92-436B-86C2-593EDF46E0C9}" type="datetimeFigureOut">
               <a:rPr lang="en-IN" smtClean="0"/>
-              <a:t>12-01-2026</a:t>
+              <a:t>13-01-2026</a:t>
             </a:fld>
             <a:endParaRPr lang="en-IN"/>
           </a:p>
@@ -597,7 +599,7 @@
           <a:p>
             <a:fld id="{CE28ABBB-BC92-436B-86C2-593EDF46E0C9}" type="datetimeFigureOut">
               <a:rPr lang="en-IN" smtClean="0"/>
-              <a:t>12-01-2026</a:t>
+              <a:t>13-01-2026</a:t>
             </a:fld>
             <a:endParaRPr lang="en-IN"/>
           </a:p>
@@ -846,7 +848,7 @@
                 </a:solidFill>
               </a:rPr>
               <a:pPr/>
-              <a:t>1/12/2026</a:t>
+              <a:t>1/13/2026</a:t>
             </a:fld>
             <a:endParaRPr lang="en-US">
               <a:solidFill>
@@ -1048,7 +1050,7 @@
                 </a:solidFill>
               </a:rPr>
               <a:pPr/>
-              <a:t>1/12/2026</a:t>
+              <a:t>1/13/2026</a:t>
             </a:fld>
             <a:endParaRPr lang="en-US">
               <a:solidFill>
@@ -1326,7 +1328,7 @@
                 </a:solidFill>
               </a:rPr>
               <a:pPr/>
-              <a:t>1/12/2026</a:t>
+              <a:t>1/13/2026</a:t>
             </a:fld>
             <a:endParaRPr lang="en-US">
               <a:solidFill>
@@ -1646,7 +1648,7 @@
                 </a:solidFill>
               </a:rPr>
               <a:pPr/>
-              <a:t>1/12/2026</a:t>
+              <a:t>1/13/2026</a:t>
             </a:fld>
             <a:endParaRPr lang="en-US">
               <a:solidFill>
@@ -2100,7 +2102,7 @@
                 </a:solidFill>
               </a:rPr>
               <a:pPr/>
-              <a:t>1/12/2026</a:t>
+              <a:t>1/13/2026</a:t>
             </a:fld>
             <a:endParaRPr lang="en-US">
               <a:solidFill>
@@ -2250,7 +2252,7 @@
                 </a:solidFill>
               </a:rPr>
               <a:pPr/>
-              <a:t>1/12/2026</a:t>
+              <a:t>1/13/2026</a:t>
             </a:fld>
             <a:endParaRPr lang="en-US">
               <a:solidFill>
@@ -2377,7 +2379,7 @@
                 </a:solidFill>
               </a:rPr>
               <a:pPr/>
-              <a:t>1/12/2026</a:t>
+              <a:t>1/13/2026</a:t>
             </a:fld>
             <a:endParaRPr lang="en-US">
               <a:solidFill>
@@ -2686,7 +2688,7 @@
                 </a:solidFill>
               </a:rPr>
               <a:pPr/>
-              <a:t>1/12/2026</a:t>
+              <a:t>1/13/2026</a:t>
             </a:fld>
             <a:endParaRPr lang="en-US">
               <a:solidFill>
@@ -2881,7 +2883,7 @@
           <a:p>
             <a:fld id="{CE28ABBB-BC92-436B-86C2-593EDF46E0C9}" type="datetimeFigureOut">
               <a:rPr lang="en-IN" smtClean="0"/>
-              <a:t>12-01-2026</a:t>
+              <a:t>13-01-2026</a:t>
             </a:fld>
             <a:endParaRPr lang="en-IN"/>
           </a:p>
@@ -3141,7 +3143,7 @@
                 </a:solidFill>
               </a:rPr>
               <a:pPr/>
-              <a:t>1/12/2026</a:t>
+              <a:t>1/13/2026</a:t>
             </a:fld>
             <a:endParaRPr lang="en-US">
               <a:solidFill>
@@ -3343,7 +3345,7 @@
                 </a:solidFill>
               </a:rPr>
               <a:pPr/>
-              <a:t>1/12/2026</a:t>
+              <a:t>1/13/2026</a:t>
             </a:fld>
             <a:endParaRPr lang="en-US">
               <a:solidFill>
@@ -3555,7 +3557,7 @@
                 </a:solidFill>
               </a:rPr>
               <a:pPr/>
-              <a:t>1/12/2026</a:t>
+              <a:t>1/13/2026</a:t>
             </a:fld>
             <a:endParaRPr lang="en-US">
               <a:solidFill>
@@ -3826,7 +3828,7 @@
           <a:p>
             <a:fld id="{CE28ABBB-BC92-436B-86C2-593EDF46E0C9}" type="datetimeFigureOut">
               <a:rPr lang="en-IN" smtClean="0"/>
-              <a:t>12-01-2026</a:t>
+              <a:t>13-01-2026</a:t>
             </a:fld>
             <a:endParaRPr lang="en-IN"/>
           </a:p>
@@ -4058,7 +4060,7 @@
           <a:p>
             <a:fld id="{CE28ABBB-BC92-436B-86C2-593EDF46E0C9}" type="datetimeFigureOut">
               <a:rPr lang="en-IN" smtClean="0"/>
-              <a:t>12-01-2026</a:t>
+              <a:t>13-01-2026</a:t>
             </a:fld>
             <a:endParaRPr lang="en-IN"/>
           </a:p>
@@ -4425,7 +4427,7 @@
           <a:p>
             <a:fld id="{CE28ABBB-BC92-436B-86C2-593EDF46E0C9}" type="datetimeFigureOut">
               <a:rPr lang="en-IN" smtClean="0"/>
-              <a:t>12-01-2026</a:t>
+              <a:t>13-01-2026</a:t>
             </a:fld>
             <a:endParaRPr lang="en-IN"/>
           </a:p>
@@ -4543,7 +4545,7 @@
           <a:p>
             <a:fld id="{CE28ABBB-BC92-436B-86C2-593EDF46E0C9}" type="datetimeFigureOut">
               <a:rPr lang="en-IN" smtClean="0"/>
-              <a:t>12-01-2026</a:t>
+              <a:t>13-01-2026</a:t>
             </a:fld>
             <a:endParaRPr lang="en-IN"/>
           </a:p>
@@ -4638,7 +4640,7 @@
           <a:p>
             <a:fld id="{CE28ABBB-BC92-436B-86C2-593EDF46E0C9}" type="datetimeFigureOut">
               <a:rPr lang="en-IN" smtClean="0"/>
-              <a:t>12-01-2026</a:t>
+              <a:t>13-01-2026</a:t>
             </a:fld>
             <a:endParaRPr lang="en-IN"/>
           </a:p>
@@ -4915,7 +4917,7 @@
           <a:p>
             <a:fld id="{CE28ABBB-BC92-436B-86C2-593EDF46E0C9}" type="datetimeFigureOut">
               <a:rPr lang="en-IN" smtClean="0"/>
-              <a:t>12-01-2026</a:t>
+              <a:t>13-01-2026</a:t>
             </a:fld>
             <a:endParaRPr lang="en-IN"/>
           </a:p>
@@ -5168,7 +5170,7 @@
           <a:p>
             <a:fld id="{CE28ABBB-BC92-436B-86C2-593EDF46E0C9}" type="datetimeFigureOut">
               <a:rPr lang="en-IN" smtClean="0"/>
-              <a:t>12-01-2026</a:t>
+              <a:t>13-01-2026</a:t>
             </a:fld>
             <a:endParaRPr lang="en-IN"/>
           </a:p>
@@ -5381,7 +5383,7 @@
           <a:p>
             <a:fld id="{CE28ABBB-BC92-436B-86C2-593EDF46E0C9}" type="datetimeFigureOut">
               <a:rPr lang="en-IN" smtClean="0"/>
-              <a:t>12-01-2026</a:t>
+              <a:t>13-01-2026</a:t>
             </a:fld>
             <a:endParaRPr lang="en-IN"/>
           </a:p>
@@ -5929,7 +5931,7 @@
                 </a:solidFill>
               </a:rPr>
               <a:pPr defTabSz="457200"/>
-              <a:t>1/12/2026</a:t>
+              <a:t>1/13/2026</a:t>
             </a:fld>
             <a:endParaRPr lang="en-US">
               <a:solidFill>
@@ -7030,6 +7032,1689 @@
           <p:nvPr/>
         </p:nvCxnSpPr>
         <p:spPr>
+          <a:xfrm>
+            <a:off x="3219582" y="1106933"/>
+            <a:ext cx="0" cy="4254230"/>
+          </a:xfrm>
+          <a:prstGeom prst="line">
+            <a:avLst/>
+          </a:prstGeom>
+          <a:ln w="28575">
+            <a:prstDash val="sysDash"/>
+          </a:ln>
+        </p:spPr>
+        <p:style>
+          <a:lnRef idx="1">
+            <a:schemeClr val="accent1"/>
+          </a:lnRef>
+          <a:fillRef idx="0">
+            <a:schemeClr val="accent1"/>
+          </a:fillRef>
+          <a:effectRef idx="0">
+            <a:schemeClr val="accent1"/>
+          </a:effectRef>
+          <a:fontRef idx="minor">
+            <a:schemeClr val="tx1"/>
+          </a:fontRef>
+        </p:style>
+      </p:cxnSp>
+      <p:cxnSp>
+        <p:nvCxnSpPr>
+          <p:cNvPr id="6" name="Straight Connector 5"/>
+          <p:cNvCxnSpPr/>
+          <p:nvPr/>
+        </p:nvCxnSpPr>
+        <p:spPr>
+          <a:xfrm>
+            <a:off x="5697814" y="1108954"/>
+            <a:ext cx="0" cy="4254230"/>
+          </a:xfrm>
+          <a:prstGeom prst="line">
+            <a:avLst/>
+          </a:prstGeom>
+          <a:ln w="28575">
+            <a:prstDash val="sysDash"/>
+          </a:ln>
+        </p:spPr>
+        <p:style>
+          <a:lnRef idx="1">
+            <a:schemeClr val="accent1"/>
+          </a:lnRef>
+          <a:fillRef idx="0">
+            <a:schemeClr val="accent1"/>
+          </a:fillRef>
+          <a:effectRef idx="0">
+            <a:schemeClr val="accent1"/>
+          </a:effectRef>
+          <a:fontRef idx="minor">
+            <a:schemeClr val="tx1"/>
+          </a:fontRef>
+        </p:style>
+      </p:cxnSp>
+      <p:sp>
+        <p:nvSpPr>
+          <p:cNvPr id="7" name="Rectangle 6"/>
+          <p:cNvSpPr/>
+          <p:nvPr/>
+        </p:nvSpPr>
+        <p:spPr>
+          <a:xfrm>
+            <a:off x="1133039" y="2513505"/>
+            <a:ext cx="1693344" cy="382621"/>
+          </a:xfrm>
+          <a:prstGeom prst="rect">
+            <a:avLst/>
+          </a:prstGeom>
+        </p:spPr>
+        <p:style>
+          <a:lnRef idx="2">
+            <a:schemeClr val="accent5">
+              <a:shade val="50000"/>
+            </a:schemeClr>
+          </a:lnRef>
+          <a:fillRef idx="1">
+            <a:schemeClr val="accent5"/>
+          </a:fillRef>
+          <a:effectRef idx="0">
+            <a:schemeClr val="accent5"/>
+          </a:effectRef>
+          <a:fontRef idx="minor">
+            <a:schemeClr val="lt1"/>
+          </a:fontRef>
+        </p:style>
+        <p:txBody>
+          <a:bodyPr rtlCol="0" anchor="ctr"/>
+          <a:lstStyle/>
+          <a:p>
+            <a:pPr algn="ctr"/>
+            <a:r>
+              <a:rPr lang="en-US" dirty="0" smtClean="0"/>
+              <a:t>UI (React JS)</a:t>
+            </a:r>
+            <a:endParaRPr lang="en-IN" dirty="0"/>
+          </a:p>
+        </p:txBody>
+      </p:sp>
+      <p:sp>
+        <p:nvSpPr>
+          <p:cNvPr id="8" name="TextBox 7"/>
+          <p:cNvSpPr txBox="1"/>
+          <p:nvPr/>
+        </p:nvSpPr>
+        <p:spPr>
+          <a:xfrm>
+            <a:off x="1797223" y="774279"/>
+            <a:ext cx="389850" cy="369332"/>
+          </a:xfrm>
+          <a:prstGeom prst="rect">
+            <a:avLst/>
+          </a:prstGeom>
+          <a:noFill/>
+        </p:spPr>
+        <p:txBody>
+          <a:bodyPr wrap="none" rtlCol="0">
+            <a:spAutoFit/>
+          </a:bodyPr>
+          <a:lstStyle/>
+          <a:p>
+            <a:r>
+              <a:rPr lang="en-US" dirty="0" smtClean="0"/>
+              <a:t>UI</a:t>
+            </a:r>
+            <a:endParaRPr lang="en-IN" dirty="0"/>
+          </a:p>
+        </p:txBody>
+      </p:sp>
+      <p:sp>
+        <p:nvSpPr>
+          <p:cNvPr id="9" name="TextBox 8"/>
+          <p:cNvSpPr txBox="1"/>
+          <p:nvPr/>
+        </p:nvSpPr>
+        <p:spPr>
+          <a:xfrm>
+            <a:off x="4097616" y="774279"/>
+            <a:ext cx="494046" cy="369332"/>
+          </a:xfrm>
+          <a:prstGeom prst="rect">
+            <a:avLst/>
+          </a:prstGeom>
+          <a:noFill/>
+        </p:spPr>
+        <p:txBody>
+          <a:bodyPr wrap="none" rtlCol="0">
+            <a:spAutoFit/>
+          </a:bodyPr>
+          <a:lstStyle/>
+          <a:p>
+            <a:r>
+              <a:rPr lang="en-US" dirty="0" smtClean="0"/>
+              <a:t>API</a:t>
+            </a:r>
+            <a:endParaRPr lang="en-IN" dirty="0"/>
+          </a:p>
+        </p:txBody>
+      </p:sp>
+      <p:sp>
+        <p:nvSpPr>
+          <p:cNvPr id="10" name="TextBox 9"/>
+          <p:cNvSpPr txBox="1"/>
+          <p:nvPr/>
+        </p:nvSpPr>
+        <p:spPr>
+          <a:xfrm>
+            <a:off x="9988327" y="774279"/>
+            <a:ext cx="452368" cy="369332"/>
+          </a:xfrm>
+          <a:prstGeom prst="rect">
+            <a:avLst/>
+          </a:prstGeom>
+          <a:noFill/>
+        </p:spPr>
+        <p:txBody>
+          <a:bodyPr wrap="none" rtlCol="0">
+            <a:spAutoFit/>
+          </a:bodyPr>
+          <a:lstStyle/>
+          <a:p>
+            <a:r>
+              <a:rPr lang="en-US" dirty="0" smtClean="0"/>
+              <a:t>DB</a:t>
+            </a:r>
+            <a:endParaRPr lang="en-IN" dirty="0"/>
+          </a:p>
+        </p:txBody>
+      </p:sp>
+      <p:sp>
+        <p:nvSpPr>
+          <p:cNvPr id="13" name="Rectangle 12"/>
+          <p:cNvSpPr/>
+          <p:nvPr/>
+        </p:nvSpPr>
+        <p:spPr>
+          <a:xfrm>
+            <a:off x="3708487" y="2516220"/>
+            <a:ext cx="1693344" cy="382621"/>
+          </a:xfrm>
+          <a:prstGeom prst="rect">
+            <a:avLst/>
+          </a:prstGeom>
+        </p:spPr>
+        <p:style>
+          <a:lnRef idx="2">
+            <a:schemeClr val="accent5">
+              <a:shade val="50000"/>
+            </a:schemeClr>
+          </a:lnRef>
+          <a:fillRef idx="1">
+            <a:schemeClr val="accent5"/>
+          </a:fillRef>
+          <a:effectRef idx="0">
+            <a:schemeClr val="accent5"/>
+          </a:effectRef>
+          <a:fontRef idx="minor">
+            <a:schemeClr val="lt1"/>
+          </a:fontRef>
+        </p:style>
+        <p:txBody>
+          <a:bodyPr rtlCol="0" anchor="ctr"/>
+          <a:lstStyle/>
+          <a:p>
+            <a:pPr algn="ctr"/>
+            <a:r>
+              <a:rPr lang="en-US" dirty="0" smtClean="0"/>
+              <a:t>.NET Core API</a:t>
+            </a:r>
+            <a:endParaRPr lang="en-IN" dirty="0"/>
+          </a:p>
+        </p:txBody>
+      </p:sp>
+      <p:sp>
+        <p:nvSpPr>
+          <p:cNvPr id="15" name="Flowchart: Magnetic Disk 14"/>
+          <p:cNvSpPr/>
+          <p:nvPr/>
+        </p:nvSpPr>
+        <p:spPr>
+          <a:xfrm>
+            <a:off x="10051589" y="2493524"/>
+            <a:ext cx="389106" cy="512731"/>
+          </a:xfrm>
+          <a:prstGeom prst="flowChartMagneticDisk">
+            <a:avLst/>
+          </a:prstGeom>
+        </p:spPr>
+        <p:style>
+          <a:lnRef idx="2">
+            <a:schemeClr val="accent2">
+              <a:shade val="50000"/>
+            </a:schemeClr>
+          </a:lnRef>
+          <a:fillRef idx="1">
+            <a:schemeClr val="accent2"/>
+          </a:fillRef>
+          <a:effectRef idx="0">
+            <a:schemeClr val="accent2"/>
+          </a:effectRef>
+          <a:fontRef idx="minor">
+            <a:schemeClr val="lt1"/>
+          </a:fontRef>
+        </p:style>
+        <p:txBody>
+          <a:bodyPr rtlCol="0" anchor="ctr"/>
+          <a:lstStyle/>
+          <a:p>
+            <a:pPr algn="ctr"/>
+            <a:endParaRPr lang="en-IN"/>
+          </a:p>
+        </p:txBody>
+      </p:sp>
+      <p:sp>
+        <p:nvSpPr>
+          <p:cNvPr id="17" name="TextBox 16"/>
+          <p:cNvSpPr txBox="1"/>
+          <p:nvPr/>
+        </p:nvSpPr>
+        <p:spPr>
+          <a:xfrm>
+            <a:off x="9720084" y="3006255"/>
+            <a:ext cx="1238431" cy="369332"/>
+          </a:xfrm>
+          <a:prstGeom prst="rect">
+            <a:avLst/>
+          </a:prstGeom>
+          <a:noFill/>
+        </p:spPr>
+        <p:txBody>
+          <a:bodyPr wrap="square" rtlCol="0">
+            <a:spAutoFit/>
+          </a:bodyPr>
+          <a:lstStyle/>
+          <a:p>
+            <a:r>
+              <a:rPr lang="en-US" dirty="0" smtClean="0"/>
+              <a:t>MS SQL DB</a:t>
+            </a:r>
+            <a:endParaRPr lang="en-IN" dirty="0"/>
+          </a:p>
+        </p:txBody>
+      </p:sp>
+      <p:sp>
+        <p:nvSpPr>
+          <p:cNvPr id="21" name="TextBox 20"/>
+          <p:cNvSpPr txBox="1"/>
+          <p:nvPr/>
+        </p:nvSpPr>
+        <p:spPr>
+          <a:xfrm>
+            <a:off x="167930" y="164386"/>
+            <a:ext cx="825547" cy="369332"/>
+          </a:xfrm>
+          <a:prstGeom prst="rect">
+            <a:avLst/>
+          </a:prstGeom>
+          <a:noFill/>
+        </p:spPr>
+        <p:txBody>
+          <a:bodyPr wrap="none" rtlCol="0">
+            <a:spAutoFit/>
+          </a:bodyPr>
+          <a:lstStyle/>
+          <a:p>
+            <a:r>
+              <a:rPr lang="en-US" dirty="0" smtClean="0"/>
+              <a:t>Logical</a:t>
+            </a:r>
+            <a:endParaRPr lang="en-IN" dirty="0"/>
+          </a:p>
+        </p:txBody>
+      </p:sp>
+      <p:pic>
+        <p:nvPicPr>
+          <p:cNvPr id="23" name="Picture 22"/>
+          <p:cNvPicPr>
+            <a:picLocks noChangeAspect="1"/>
+          </p:cNvPicPr>
+          <p:nvPr/>
+        </p:nvPicPr>
+        <p:blipFill rotWithShape="1">
+          <a:blip r:embed="rId2" cstate="print">
+            <a:extLst>
+              <a:ext uri="{28A0092B-C50C-407E-A947-70E740481C1C}">
+                <a14:useLocalDpi xmlns:a14="http://schemas.microsoft.com/office/drawing/2010/main" val="0"/>
+              </a:ext>
+            </a:extLst>
+          </a:blip>
+          <a:srcRect l="7541" t="25254" r="56968" b="28165"/>
+          <a:stretch/>
+        </p:blipFill>
+        <p:spPr>
+          <a:xfrm>
+            <a:off x="6211515" y="1889178"/>
+            <a:ext cx="518809" cy="453958"/>
+          </a:xfrm>
+          <a:prstGeom prst="rect">
+            <a:avLst/>
+          </a:prstGeom>
+        </p:spPr>
+      </p:pic>
+      <p:sp>
+        <p:nvSpPr>
+          <p:cNvPr id="24" name="TextBox 23"/>
+          <p:cNvSpPr txBox="1"/>
+          <p:nvPr/>
+        </p:nvSpPr>
+        <p:spPr>
+          <a:xfrm>
+            <a:off x="6617510" y="1920975"/>
+            <a:ext cx="1238431" cy="369332"/>
+          </a:xfrm>
+          <a:prstGeom prst="rect">
+            <a:avLst/>
+          </a:prstGeom>
+          <a:noFill/>
+        </p:spPr>
+        <p:txBody>
+          <a:bodyPr wrap="square" rtlCol="0">
+            <a:spAutoFit/>
+          </a:bodyPr>
+          <a:lstStyle/>
+          <a:p>
+            <a:r>
+              <a:rPr lang="en-US" dirty="0" smtClean="0"/>
+              <a:t>Redis</a:t>
+            </a:r>
+            <a:endParaRPr lang="en-IN" dirty="0"/>
+          </a:p>
+        </p:txBody>
+      </p:sp>
+      <p:sp>
+        <p:nvSpPr>
+          <p:cNvPr id="22" name="TextBox 21"/>
+          <p:cNvSpPr txBox="1"/>
+          <p:nvPr/>
+        </p:nvSpPr>
+        <p:spPr>
+          <a:xfrm>
+            <a:off x="7629775" y="774279"/>
+            <a:ext cx="1189428" cy="369332"/>
+          </a:xfrm>
+          <a:prstGeom prst="rect">
+            <a:avLst/>
+          </a:prstGeom>
+          <a:noFill/>
+        </p:spPr>
+        <p:txBody>
+          <a:bodyPr wrap="none" rtlCol="0">
+            <a:spAutoFit/>
+          </a:bodyPr>
+          <a:lstStyle/>
+          <a:p>
+            <a:r>
+              <a:rPr lang="en-US" dirty="0" smtClean="0"/>
+              <a:t>Repository</a:t>
+            </a:r>
+            <a:endParaRPr lang="en-IN" dirty="0"/>
+          </a:p>
+        </p:txBody>
+      </p:sp>
+      <p:sp>
+        <p:nvSpPr>
+          <p:cNvPr id="28" name="TextBox 27"/>
+          <p:cNvSpPr txBox="1"/>
+          <p:nvPr/>
+        </p:nvSpPr>
+        <p:spPr>
+          <a:xfrm>
+            <a:off x="6070422" y="774279"/>
+            <a:ext cx="753732" cy="369332"/>
+          </a:xfrm>
+          <a:prstGeom prst="rect">
+            <a:avLst/>
+          </a:prstGeom>
+          <a:noFill/>
+        </p:spPr>
+        <p:txBody>
+          <a:bodyPr wrap="none" rtlCol="0">
+            <a:spAutoFit/>
+          </a:bodyPr>
+          <a:lstStyle/>
+          <a:p>
+            <a:r>
+              <a:rPr lang="en-US" dirty="0" smtClean="0"/>
+              <a:t>Cache</a:t>
+            </a:r>
+            <a:endParaRPr lang="en-IN" dirty="0"/>
+          </a:p>
+        </p:txBody>
+      </p:sp>
+      <p:cxnSp>
+        <p:nvCxnSpPr>
+          <p:cNvPr id="3" name="Curved Connector 2"/>
+          <p:cNvCxnSpPr>
+            <a:stCxn id="7" idx="3"/>
+            <a:endCxn id="13" idx="1"/>
+          </p:cNvCxnSpPr>
+          <p:nvPr/>
+        </p:nvCxnSpPr>
+        <p:spPr>
+          <a:xfrm>
+            <a:off x="2826383" y="2704816"/>
+            <a:ext cx="882104" cy="2715"/>
+          </a:xfrm>
+          <a:prstGeom prst="curvedConnector3">
+            <a:avLst/>
+          </a:prstGeom>
+          <a:ln>
+            <a:tailEnd type="triangle"/>
+          </a:ln>
+        </p:spPr>
+        <p:style>
+          <a:lnRef idx="1">
+            <a:schemeClr val="accent1"/>
+          </a:lnRef>
+          <a:fillRef idx="0">
+            <a:schemeClr val="accent1"/>
+          </a:fillRef>
+          <a:effectRef idx="0">
+            <a:schemeClr val="accent1"/>
+          </a:effectRef>
+          <a:fontRef idx="minor">
+            <a:schemeClr val="tx1"/>
+          </a:fontRef>
+        </p:style>
+      </p:cxnSp>
+      <p:cxnSp>
+        <p:nvCxnSpPr>
+          <p:cNvPr id="29" name="Curved Connector 28"/>
+          <p:cNvCxnSpPr>
+            <a:stCxn id="13" idx="3"/>
+            <a:endCxn id="23" idx="1"/>
+          </p:cNvCxnSpPr>
+          <p:nvPr/>
+        </p:nvCxnSpPr>
+        <p:spPr>
+          <a:xfrm flipV="1">
+            <a:off x="5401831" y="2116157"/>
+            <a:ext cx="809684" cy="591374"/>
+          </a:xfrm>
+          <a:prstGeom prst="curvedConnector3">
+            <a:avLst/>
+          </a:prstGeom>
+          <a:ln>
+            <a:tailEnd type="triangle"/>
+          </a:ln>
+        </p:spPr>
+        <p:style>
+          <a:lnRef idx="1">
+            <a:schemeClr val="accent1"/>
+          </a:lnRef>
+          <a:fillRef idx="0">
+            <a:schemeClr val="accent1"/>
+          </a:fillRef>
+          <a:effectRef idx="0">
+            <a:schemeClr val="accent1"/>
+          </a:effectRef>
+          <a:fontRef idx="minor">
+            <a:schemeClr val="tx1"/>
+          </a:fontRef>
+        </p:style>
+      </p:cxnSp>
+      <p:sp>
+        <p:nvSpPr>
+          <p:cNvPr id="31" name="Rectangle 30"/>
+          <p:cNvSpPr/>
+          <p:nvPr/>
+        </p:nvSpPr>
+        <p:spPr>
+          <a:xfrm>
+            <a:off x="7809851" y="2749889"/>
+            <a:ext cx="1259348" cy="382621"/>
+          </a:xfrm>
+          <a:prstGeom prst="rect">
+            <a:avLst/>
+          </a:prstGeom>
+        </p:spPr>
+        <p:style>
+          <a:lnRef idx="2">
+            <a:schemeClr val="accent5">
+              <a:shade val="50000"/>
+            </a:schemeClr>
+          </a:lnRef>
+          <a:fillRef idx="1">
+            <a:schemeClr val="accent5"/>
+          </a:fillRef>
+          <a:effectRef idx="0">
+            <a:schemeClr val="accent5"/>
+          </a:effectRef>
+          <a:fontRef idx="minor">
+            <a:schemeClr val="lt1"/>
+          </a:fontRef>
+        </p:style>
+        <p:txBody>
+          <a:bodyPr rtlCol="0" anchor="ctr"/>
+          <a:lstStyle/>
+          <a:p>
+            <a:pPr algn="ctr"/>
+            <a:r>
+              <a:rPr lang="en-US" dirty="0" smtClean="0"/>
+              <a:t>Repository</a:t>
+            </a:r>
+            <a:endParaRPr lang="en-IN" dirty="0"/>
+          </a:p>
+        </p:txBody>
+      </p:sp>
+      <p:cxnSp>
+        <p:nvCxnSpPr>
+          <p:cNvPr id="32" name="Curved Connector 31"/>
+          <p:cNvCxnSpPr>
+            <a:stCxn id="13" idx="3"/>
+            <a:endCxn id="31" idx="1"/>
+          </p:cNvCxnSpPr>
+          <p:nvPr/>
+        </p:nvCxnSpPr>
+        <p:spPr>
+          <a:xfrm>
+            <a:off x="5401831" y="2707531"/>
+            <a:ext cx="2408020" cy="233669"/>
+          </a:xfrm>
+          <a:prstGeom prst="curvedConnector3">
+            <a:avLst/>
+          </a:prstGeom>
+          <a:ln>
+            <a:tailEnd type="triangle"/>
+          </a:ln>
+        </p:spPr>
+        <p:style>
+          <a:lnRef idx="1">
+            <a:schemeClr val="accent1"/>
+          </a:lnRef>
+          <a:fillRef idx="0">
+            <a:schemeClr val="accent1"/>
+          </a:fillRef>
+          <a:effectRef idx="0">
+            <a:schemeClr val="accent1"/>
+          </a:effectRef>
+          <a:fontRef idx="minor">
+            <a:schemeClr val="tx1"/>
+          </a:fontRef>
+        </p:style>
+      </p:cxnSp>
+      <p:cxnSp>
+        <p:nvCxnSpPr>
+          <p:cNvPr id="35" name="Straight Connector 34"/>
+          <p:cNvCxnSpPr/>
+          <p:nvPr/>
+        </p:nvCxnSpPr>
+        <p:spPr>
+          <a:xfrm>
+            <a:off x="7366594" y="1086021"/>
+            <a:ext cx="0" cy="4254230"/>
+          </a:xfrm>
+          <a:prstGeom prst="line">
+            <a:avLst/>
+          </a:prstGeom>
+          <a:ln w="28575">
+            <a:prstDash val="sysDash"/>
+          </a:ln>
+        </p:spPr>
+        <p:style>
+          <a:lnRef idx="1">
+            <a:schemeClr val="accent1"/>
+          </a:lnRef>
+          <a:fillRef idx="0">
+            <a:schemeClr val="accent1"/>
+          </a:fillRef>
+          <a:effectRef idx="0">
+            <a:schemeClr val="accent1"/>
+          </a:effectRef>
+          <a:fontRef idx="minor">
+            <a:schemeClr val="tx1"/>
+          </a:fontRef>
+        </p:style>
+      </p:cxnSp>
+      <p:cxnSp>
+        <p:nvCxnSpPr>
+          <p:cNvPr id="38" name="Curved Connector 37"/>
+          <p:cNvCxnSpPr>
+            <a:stCxn id="31" idx="3"/>
+            <a:endCxn id="15" idx="2"/>
+          </p:cNvCxnSpPr>
+          <p:nvPr/>
+        </p:nvCxnSpPr>
+        <p:spPr>
+          <a:xfrm flipV="1">
+            <a:off x="9069199" y="2749890"/>
+            <a:ext cx="982390" cy="191310"/>
+          </a:xfrm>
+          <a:prstGeom prst="curvedConnector3">
+            <a:avLst>
+              <a:gd name="adj1" fmla="val 50000"/>
+            </a:avLst>
+          </a:prstGeom>
+          <a:ln>
+            <a:tailEnd type="triangle"/>
+          </a:ln>
+        </p:spPr>
+        <p:style>
+          <a:lnRef idx="1">
+            <a:schemeClr val="accent1"/>
+          </a:lnRef>
+          <a:fillRef idx="0">
+            <a:schemeClr val="accent1"/>
+          </a:fillRef>
+          <a:effectRef idx="0">
+            <a:schemeClr val="accent1"/>
+          </a:effectRef>
+          <a:fontRef idx="minor">
+            <a:schemeClr val="tx1"/>
+          </a:fontRef>
+        </p:style>
+      </p:cxnSp>
+      <p:cxnSp>
+        <p:nvCxnSpPr>
+          <p:cNvPr id="40" name="Straight Connector 39"/>
+          <p:cNvCxnSpPr/>
+          <p:nvPr/>
+        </p:nvCxnSpPr>
+        <p:spPr>
+          <a:xfrm>
+            <a:off x="9431614" y="1106933"/>
+            <a:ext cx="0" cy="4254230"/>
+          </a:xfrm>
+          <a:prstGeom prst="line">
+            <a:avLst/>
+          </a:prstGeom>
+          <a:ln w="28575">
+            <a:prstDash val="sysDash"/>
+          </a:ln>
+        </p:spPr>
+        <p:style>
+          <a:lnRef idx="1">
+            <a:schemeClr val="accent1"/>
+          </a:lnRef>
+          <a:fillRef idx="0">
+            <a:schemeClr val="accent1"/>
+          </a:fillRef>
+          <a:effectRef idx="0">
+            <a:schemeClr val="accent1"/>
+          </a:effectRef>
+          <a:fontRef idx="minor">
+            <a:schemeClr val="tx1"/>
+          </a:fontRef>
+        </p:style>
+      </p:cxnSp>
+    </p:spTree>
+    <p:extLst>
+      <p:ext uri="{BB962C8B-B14F-4D97-AF65-F5344CB8AC3E}">
+        <p14:creationId xmlns:p14="http://schemas.microsoft.com/office/powerpoint/2010/main" val="921151545"/>
+      </p:ext>
+    </p:extLst>
+  </p:cSld>
+  <p:clrMapOvr>
+    <a:masterClrMapping/>
+  </p:clrMapOvr>
+  <p:timing>
+    <p:tnLst>
+      <p:par>
+        <p:cTn id="1" dur="indefinite" restart="never" nodeType="tmRoot"/>
+      </p:par>
+    </p:tnLst>
+  </p:timing>
+</p:sld>
+</file>
+
+<file path=ppt/slides/slide3.xml><?xml version="1.0" encoding="utf-8"?>
+<p:sld xmlns:a="http://schemas.openxmlformats.org/drawingml/2006/main" xmlns:r="http://schemas.openxmlformats.org/officeDocument/2006/relationships" xmlns:p="http://schemas.openxmlformats.org/presentationml/2006/main">
+  <p:cSld>
+    <p:spTree>
+      <p:nvGrpSpPr>
+        <p:cNvPr id="1" name=""/>
+        <p:cNvGrpSpPr/>
+        <p:nvPr/>
+      </p:nvGrpSpPr>
+      <p:grpSpPr>
+        <a:xfrm>
+          <a:off x="0" y="0"/>
+          <a:ext cx="0" cy="0"/>
+          <a:chOff x="0" y="0"/>
+          <a:chExt cx="0" cy="0"/>
+        </a:xfrm>
+      </p:grpSpPr>
+      <p:sp>
+        <p:nvSpPr>
+          <p:cNvPr id="90" name="Rectangle 89"/>
+          <p:cNvSpPr/>
+          <p:nvPr/>
+        </p:nvSpPr>
+        <p:spPr>
+          <a:xfrm>
+            <a:off x="4387108" y="2399754"/>
+            <a:ext cx="1885869" cy="1814106"/>
+          </a:xfrm>
+          <a:prstGeom prst="rect">
+            <a:avLst/>
+          </a:prstGeom>
+        </p:spPr>
+        <p:style>
+          <a:lnRef idx="2">
+            <a:schemeClr val="accent1"/>
+          </a:lnRef>
+          <a:fillRef idx="1">
+            <a:schemeClr val="lt1"/>
+          </a:fillRef>
+          <a:effectRef idx="0">
+            <a:schemeClr val="accent1"/>
+          </a:effectRef>
+          <a:fontRef idx="minor">
+            <a:schemeClr val="dk1"/>
+          </a:fontRef>
+        </p:style>
+        <p:txBody>
+          <a:bodyPr rtlCol="0" anchor="ctr"/>
+          <a:lstStyle/>
+          <a:p>
+            <a:pPr algn="ctr"/>
+            <a:endParaRPr lang="en-IN"/>
+          </a:p>
+        </p:txBody>
+      </p:sp>
+      <p:cxnSp>
+        <p:nvCxnSpPr>
+          <p:cNvPr id="5" name="Straight Connector 4"/>
+          <p:cNvCxnSpPr/>
+          <p:nvPr/>
+        </p:nvCxnSpPr>
+        <p:spPr>
+          <a:xfrm flipH="1">
+            <a:off x="4089367" y="1234610"/>
+            <a:ext cx="8663" cy="4840498"/>
+          </a:xfrm>
+          <a:prstGeom prst="line">
+            <a:avLst/>
+          </a:prstGeom>
+          <a:ln w="28575">
+            <a:prstDash val="sysDash"/>
+          </a:ln>
+        </p:spPr>
+        <p:style>
+          <a:lnRef idx="1">
+            <a:schemeClr val="accent1"/>
+          </a:lnRef>
+          <a:fillRef idx="0">
+            <a:schemeClr val="accent1"/>
+          </a:fillRef>
+          <a:effectRef idx="0">
+            <a:schemeClr val="accent1"/>
+          </a:effectRef>
+          <a:fontRef idx="minor">
+            <a:schemeClr val="tx1"/>
+          </a:fontRef>
+        </p:style>
+      </p:cxnSp>
+      <p:cxnSp>
+        <p:nvCxnSpPr>
+          <p:cNvPr id="6" name="Straight Connector 5"/>
+          <p:cNvCxnSpPr/>
+          <p:nvPr/>
+        </p:nvCxnSpPr>
+        <p:spPr>
+          <a:xfrm>
+            <a:off x="6581725" y="1217402"/>
+            <a:ext cx="0" cy="4824000"/>
+          </a:xfrm>
+          <a:prstGeom prst="line">
+            <a:avLst/>
+          </a:prstGeom>
+          <a:ln w="28575">
+            <a:prstDash val="sysDash"/>
+          </a:ln>
+        </p:spPr>
+        <p:style>
+          <a:lnRef idx="1">
+            <a:schemeClr val="accent1"/>
+          </a:lnRef>
+          <a:fillRef idx="0">
+            <a:schemeClr val="accent1"/>
+          </a:fillRef>
+          <a:effectRef idx="0">
+            <a:schemeClr val="accent1"/>
+          </a:effectRef>
+          <a:fontRef idx="minor">
+            <a:schemeClr val="tx1"/>
+          </a:fontRef>
+        </p:style>
+      </p:cxnSp>
+      <p:sp>
+        <p:nvSpPr>
+          <p:cNvPr id="8" name="TextBox 7"/>
+          <p:cNvSpPr txBox="1"/>
+          <p:nvPr/>
+        </p:nvSpPr>
+        <p:spPr>
+          <a:xfrm>
+            <a:off x="2542819" y="1208823"/>
+            <a:ext cx="373820" cy="338554"/>
+          </a:xfrm>
+          <a:prstGeom prst="rect">
+            <a:avLst/>
+          </a:prstGeom>
+          <a:noFill/>
+        </p:spPr>
+        <p:txBody>
+          <a:bodyPr wrap="none" rtlCol="0">
+            <a:spAutoFit/>
+          </a:bodyPr>
+          <a:lstStyle/>
+          <a:p>
+            <a:r>
+              <a:rPr lang="en-US" sz="1600" b="1" dirty="0" smtClean="0"/>
+              <a:t>UI</a:t>
+            </a:r>
+            <a:endParaRPr lang="en-IN" sz="1600" b="1" dirty="0"/>
+          </a:p>
+        </p:txBody>
+      </p:sp>
+      <p:sp>
+        <p:nvSpPr>
+          <p:cNvPr id="10" name="TextBox 9"/>
+          <p:cNvSpPr txBox="1"/>
+          <p:nvPr/>
+        </p:nvSpPr>
+        <p:spPr>
+          <a:xfrm>
+            <a:off x="10241060" y="1197481"/>
+            <a:ext cx="429926" cy="338554"/>
+          </a:xfrm>
+          <a:prstGeom prst="rect">
+            <a:avLst/>
+          </a:prstGeom>
+          <a:noFill/>
+        </p:spPr>
+        <p:txBody>
+          <a:bodyPr wrap="none" rtlCol="0">
+            <a:spAutoFit/>
+          </a:bodyPr>
+          <a:lstStyle/>
+          <a:p>
+            <a:r>
+              <a:rPr lang="en-US" sz="1600" b="1" dirty="0" smtClean="0"/>
+              <a:t>DB</a:t>
+            </a:r>
+            <a:endParaRPr lang="en-IN" sz="1600" b="1" dirty="0"/>
+          </a:p>
+        </p:txBody>
+      </p:sp>
+      <p:sp>
+        <p:nvSpPr>
+          <p:cNvPr id="11" name="Rectangle 10"/>
+          <p:cNvSpPr/>
+          <p:nvPr/>
+        </p:nvSpPr>
+        <p:spPr>
+          <a:xfrm>
+            <a:off x="2069645" y="2974774"/>
+            <a:ext cx="1549587" cy="897570"/>
+          </a:xfrm>
+          <a:prstGeom prst="rect">
+            <a:avLst/>
+          </a:prstGeom>
+        </p:spPr>
+        <p:style>
+          <a:lnRef idx="3">
+            <a:schemeClr val="lt1"/>
+          </a:lnRef>
+          <a:fillRef idx="1">
+            <a:schemeClr val="accent5"/>
+          </a:fillRef>
+          <a:effectRef idx="1">
+            <a:schemeClr val="accent5"/>
+          </a:effectRef>
+          <a:fontRef idx="minor">
+            <a:schemeClr val="lt1"/>
+          </a:fontRef>
+        </p:style>
+        <p:txBody>
+          <a:bodyPr rtlCol="0" anchor="ctr"/>
+          <a:lstStyle/>
+          <a:p>
+            <a:pPr algn="ctr"/>
+            <a:r>
+              <a:rPr lang="en-US" sz="1400" dirty="0" smtClean="0"/>
+              <a:t>React JS with </a:t>
+            </a:r>
+          </a:p>
+          <a:p>
+            <a:pPr algn="ctr"/>
+            <a:r>
+              <a:rPr lang="en-US" sz="1400" dirty="0" smtClean="0"/>
+              <a:t>Redux toolkit</a:t>
+            </a:r>
+            <a:endParaRPr lang="en-IN" sz="1400" dirty="0"/>
+          </a:p>
+        </p:txBody>
+      </p:sp>
+      <p:pic>
+        <p:nvPicPr>
+          <p:cNvPr id="14" name="Picture 13"/>
+          <p:cNvPicPr>
+            <a:picLocks noChangeAspect="1"/>
+          </p:cNvPicPr>
+          <p:nvPr/>
+        </p:nvPicPr>
+        <p:blipFill rotWithShape="1">
+          <a:blip r:embed="rId2" cstate="print">
+            <a:extLst>
+              <a:ext uri="{28A0092B-C50C-407E-A947-70E740481C1C}">
+                <a14:useLocalDpi xmlns:a14="http://schemas.microsoft.com/office/drawing/2010/main" val="0"/>
+              </a:ext>
+            </a:extLst>
+          </a:blip>
+          <a:srcRect l="7541" t="25254" r="56968" b="28165"/>
+          <a:stretch/>
+        </p:blipFill>
+        <p:spPr>
+          <a:xfrm>
+            <a:off x="7251931" y="2050215"/>
+            <a:ext cx="619268" cy="545104"/>
+          </a:xfrm>
+          <a:prstGeom prst="rect">
+            <a:avLst/>
+          </a:prstGeom>
+        </p:spPr>
+      </p:pic>
+      <p:sp>
+        <p:nvSpPr>
+          <p:cNvPr id="15" name="Flowchart: Magnetic Disk 14"/>
+          <p:cNvSpPr/>
+          <p:nvPr/>
+        </p:nvSpPr>
+        <p:spPr>
+          <a:xfrm>
+            <a:off x="10356463" y="2811611"/>
+            <a:ext cx="410598" cy="636572"/>
+          </a:xfrm>
+          <a:prstGeom prst="flowChartMagneticDisk">
+            <a:avLst/>
+          </a:prstGeom>
+        </p:spPr>
+        <p:style>
+          <a:lnRef idx="2">
+            <a:schemeClr val="accent2">
+              <a:shade val="50000"/>
+            </a:schemeClr>
+          </a:lnRef>
+          <a:fillRef idx="1">
+            <a:schemeClr val="accent2"/>
+          </a:fillRef>
+          <a:effectRef idx="0">
+            <a:schemeClr val="accent2"/>
+          </a:effectRef>
+          <a:fontRef idx="minor">
+            <a:schemeClr val="lt1"/>
+          </a:fontRef>
+        </p:style>
+        <p:txBody>
+          <a:bodyPr rtlCol="0" anchor="ctr"/>
+          <a:lstStyle/>
+          <a:p>
+            <a:pPr algn="ctr"/>
+            <a:endParaRPr lang="en-IN" sz="1400"/>
+          </a:p>
+        </p:txBody>
+      </p:sp>
+      <p:sp>
+        <p:nvSpPr>
+          <p:cNvPr id="17" name="TextBox 16"/>
+          <p:cNvSpPr txBox="1"/>
+          <p:nvPr/>
+        </p:nvSpPr>
+        <p:spPr>
+          <a:xfrm>
+            <a:off x="10148425" y="3492714"/>
+            <a:ext cx="1122976" cy="307777"/>
+          </a:xfrm>
+          <a:prstGeom prst="rect">
+            <a:avLst/>
+          </a:prstGeom>
+          <a:noFill/>
+        </p:spPr>
+        <p:txBody>
+          <a:bodyPr wrap="square" rtlCol="0">
+            <a:spAutoFit/>
+          </a:bodyPr>
+          <a:lstStyle/>
+          <a:p>
+            <a:r>
+              <a:rPr lang="en-US" sz="1400" dirty="0" smtClean="0"/>
+              <a:t>MS SQL DB</a:t>
+            </a:r>
+            <a:endParaRPr lang="en-IN" sz="1400" dirty="0"/>
+          </a:p>
+        </p:txBody>
+      </p:sp>
+      <p:sp>
+        <p:nvSpPr>
+          <p:cNvPr id="26" name="TextBox 25"/>
+          <p:cNvSpPr txBox="1"/>
+          <p:nvPr/>
+        </p:nvSpPr>
+        <p:spPr>
+          <a:xfrm>
+            <a:off x="7285961" y="2537197"/>
+            <a:ext cx="1272719" cy="307777"/>
+          </a:xfrm>
+          <a:prstGeom prst="rect">
+            <a:avLst/>
+          </a:prstGeom>
+          <a:noFill/>
+        </p:spPr>
+        <p:txBody>
+          <a:bodyPr wrap="square" rtlCol="0">
+            <a:spAutoFit/>
+          </a:bodyPr>
+          <a:lstStyle/>
+          <a:p>
+            <a:r>
+              <a:rPr lang="en-US" sz="1400" dirty="0" smtClean="0"/>
+              <a:t>Redis</a:t>
+            </a:r>
+            <a:endParaRPr lang="en-IN" sz="1400" dirty="0"/>
+          </a:p>
+        </p:txBody>
+      </p:sp>
+      <p:sp>
+        <p:nvSpPr>
+          <p:cNvPr id="20" name="Rectangle 19"/>
+          <p:cNvSpPr/>
+          <p:nvPr/>
+        </p:nvSpPr>
+        <p:spPr>
+          <a:xfrm>
+            <a:off x="4476282" y="3121197"/>
+            <a:ext cx="1693344" cy="355581"/>
+          </a:xfrm>
+          <a:prstGeom prst="rect">
+            <a:avLst/>
+          </a:prstGeom>
+        </p:spPr>
+        <p:style>
+          <a:lnRef idx="3">
+            <a:schemeClr val="lt1"/>
+          </a:lnRef>
+          <a:fillRef idx="1">
+            <a:schemeClr val="accent5"/>
+          </a:fillRef>
+          <a:effectRef idx="1">
+            <a:schemeClr val="accent5"/>
+          </a:effectRef>
+          <a:fontRef idx="minor">
+            <a:schemeClr val="lt1"/>
+          </a:fontRef>
+        </p:style>
+        <p:txBody>
+          <a:bodyPr rtlCol="0" anchor="ctr"/>
+          <a:lstStyle/>
+          <a:p>
+            <a:pPr algn="ctr"/>
+            <a:r>
+              <a:rPr lang="en-US" sz="1400" dirty="0" smtClean="0"/>
+              <a:t>Product Service</a:t>
+            </a:r>
+            <a:endParaRPr lang="en-IN" sz="1400" dirty="0"/>
+          </a:p>
+        </p:txBody>
+      </p:sp>
+      <p:sp>
+        <p:nvSpPr>
+          <p:cNvPr id="21" name="Rectangle 20"/>
+          <p:cNvSpPr/>
+          <p:nvPr/>
+        </p:nvSpPr>
+        <p:spPr>
+          <a:xfrm>
+            <a:off x="4476282" y="3542942"/>
+            <a:ext cx="1693344" cy="382621"/>
+          </a:xfrm>
+          <a:prstGeom prst="rect">
+            <a:avLst/>
+          </a:prstGeom>
+        </p:spPr>
+        <p:style>
+          <a:lnRef idx="3">
+            <a:schemeClr val="lt1"/>
+          </a:lnRef>
+          <a:fillRef idx="1">
+            <a:schemeClr val="accent5"/>
+          </a:fillRef>
+          <a:effectRef idx="1">
+            <a:schemeClr val="accent5"/>
+          </a:effectRef>
+          <a:fontRef idx="minor">
+            <a:schemeClr val="lt1"/>
+          </a:fontRef>
+        </p:style>
+        <p:txBody>
+          <a:bodyPr rtlCol="0" anchor="ctr"/>
+          <a:lstStyle/>
+          <a:p>
+            <a:pPr algn="ctr"/>
+            <a:r>
+              <a:rPr lang="en-US" sz="1400" dirty="0" smtClean="0"/>
+              <a:t>User </a:t>
+            </a:r>
+            <a:r>
+              <a:rPr lang="en-US" sz="1400" dirty="0" smtClean="0"/>
+              <a:t>Service</a:t>
+            </a:r>
+            <a:endParaRPr lang="en-IN" sz="1400" dirty="0"/>
+          </a:p>
+        </p:txBody>
+      </p:sp>
+      <p:sp>
+        <p:nvSpPr>
+          <p:cNvPr id="22" name="Rectangle 21"/>
+          <p:cNvSpPr/>
+          <p:nvPr/>
+        </p:nvSpPr>
+        <p:spPr>
+          <a:xfrm>
+            <a:off x="4476282" y="2707531"/>
+            <a:ext cx="1693344" cy="382621"/>
+          </a:xfrm>
+          <a:prstGeom prst="rect">
+            <a:avLst/>
+          </a:prstGeom>
+        </p:spPr>
+        <p:style>
+          <a:lnRef idx="3">
+            <a:schemeClr val="lt1"/>
+          </a:lnRef>
+          <a:fillRef idx="1">
+            <a:schemeClr val="accent5"/>
+          </a:fillRef>
+          <a:effectRef idx="1">
+            <a:schemeClr val="accent5"/>
+          </a:effectRef>
+          <a:fontRef idx="minor">
+            <a:schemeClr val="lt1"/>
+          </a:fontRef>
+        </p:style>
+        <p:txBody>
+          <a:bodyPr rtlCol="0" anchor="ctr"/>
+          <a:lstStyle/>
+          <a:p>
+            <a:pPr algn="ctr"/>
+            <a:r>
+              <a:rPr lang="en-US" sz="1400" dirty="0" smtClean="0"/>
+              <a:t>Categories Service</a:t>
+            </a:r>
+            <a:endParaRPr lang="en-IN" sz="1400" dirty="0"/>
+          </a:p>
+        </p:txBody>
+      </p:sp>
+      <p:sp>
+        <p:nvSpPr>
+          <p:cNvPr id="2" name="TextBox 1"/>
+          <p:cNvSpPr txBox="1"/>
+          <p:nvPr/>
+        </p:nvSpPr>
+        <p:spPr>
+          <a:xfrm>
+            <a:off x="4627370" y="2399754"/>
+            <a:ext cx="1876026" cy="307777"/>
+          </a:xfrm>
+          <a:prstGeom prst="rect">
+            <a:avLst/>
+          </a:prstGeom>
+          <a:noFill/>
+        </p:spPr>
+        <p:txBody>
+          <a:bodyPr wrap="square" rtlCol="0">
+            <a:spAutoFit/>
+          </a:bodyPr>
+          <a:lstStyle/>
+          <a:p>
+            <a:r>
+              <a:rPr lang="en-US" sz="1400" b="1" dirty="0" smtClean="0">
+                <a:solidFill>
+                  <a:schemeClr val="bg1"/>
+                </a:solidFill>
+              </a:rPr>
+              <a:t>Products Service</a:t>
+            </a:r>
+            <a:endParaRPr lang="en-IN" sz="1400" b="1" dirty="0">
+              <a:solidFill>
+                <a:schemeClr val="bg1"/>
+              </a:solidFill>
+            </a:endParaRPr>
+          </a:p>
+        </p:txBody>
+      </p:sp>
+      <p:sp>
+        <p:nvSpPr>
+          <p:cNvPr id="111" name="TextBox 110"/>
+          <p:cNvSpPr txBox="1"/>
+          <p:nvPr/>
+        </p:nvSpPr>
+        <p:spPr>
+          <a:xfrm>
+            <a:off x="5047844" y="1198622"/>
+            <a:ext cx="473206" cy="338554"/>
+          </a:xfrm>
+          <a:prstGeom prst="rect">
+            <a:avLst/>
+          </a:prstGeom>
+          <a:noFill/>
+        </p:spPr>
+        <p:txBody>
+          <a:bodyPr wrap="none" rtlCol="0">
+            <a:spAutoFit/>
+          </a:bodyPr>
+          <a:lstStyle/>
+          <a:p>
+            <a:r>
+              <a:rPr lang="en-US" sz="1600" b="1" dirty="0" smtClean="0"/>
+              <a:t>API</a:t>
+            </a:r>
+            <a:endParaRPr lang="en-IN" sz="1600" b="1" dirty="0"/>
+          </a:p>
+        </p:txBody>
+      </p:sp>
+      <p:cxnSp>
+        <p:nvCxnSpPr>
+          <p:cNvPr id="125" name="Curved Connector 124"/>
+          <p:cNvCxnSpPr>
+            <a:stCxn id="90" idx="3"/>
+            <a:endCxn id="14" idx="1"/>
+          </p:cNvCxnSpPr>
+          <p:nvPr/>
+        </p:nvCxnSpPr>
+        <p:spPr>
+          <a:xfrm flipV="1">
+            <a:off x="6272977" y="2322767"/>
+            <a:ext cx="978954" cy="984040"/>
+          </a:xfrm>
+          <a:prstGeom prst="curvedConnector3">
+            <a:avLst/>
+          </a:prstGeom>
+          <a:ln>
+            <a:tailEnd type="triangle"/>
+          </a:ln>
+        </p:spPr>
+        <p:style>
+          <a:lnRef idx="1">
+            <a:schemeClr val="accent1"/>
+          </a:lnRef>
+          <a:fillRef idx="0">
+            <a:schemeClr val="accent1"/>
+          </a:fillRef>
+          <a:effectRef idx="0">
+            <a:schemeClr val="accent1"/>
+          </a:effectRef>
+          <a:fontRef idx="minor">
+            <a:schemeClr val="tx1"/>
+          </a:fontRef>
+        </p:style>
+      </p:cxnSp>
+      <p:cxnSp>
+        <p:nvCxnSpPr>
+          <p:cNvPr id="127" name="Curved Connector 126"/>
+          <p:cNvCxnSpPr>
+            <a:stCxn id="90" idx="3"/>
+            <a:endCxn id="58" idx="1"/>
+          </p:cNvCxnSpPr>
+          <p:nvPr/>
+        </p:nvCxnSpPr>
+        <p:spPr>
+          <a:xfrm flipV="1">
+            <a:off x="6272977" y="3156316"/>
+            <a:ext cx="2345707" cy="150491"/>
+          </a:xfrm>
+          <a:prstGeom prst="curvedConnector3">
+            <a:avLst>
+              <a:gd name="adj1" fmla="val 50000"/>
+            </a:avLst>
+          </a:prstGeom>
+          <a:ln>
+            <a:tailEnd type="triangle"/>
+          </a:ln>
+        </p:spPr>
+        <p:style>
+          <a:lnRef idx="1">
+            <a:schemeClr val="accent1"/>
+          </a:lnRef>
+          <a:fillRef idx="0">
+            <a:schemeClr val="accent1"/>
+          </a:fillRef>
+          <a:effectRef idx="0">
+            <a:schemeClr val="accent1"/>
+          </a:effectRef>
+          <a:fontRef idx="minor">
+            <a:schemeClr val="tx1"/>
+          </a:fontRef>
+        </p:style>
+      </p:cxnSp>
+      <p:cxnSp>
+        <p:nvCxnSpPr>
+          <p:cNvPr id="130" name="Curved Connector 129"/>
+          <p:cNvCxnSpPr>
+            <a:stCxn id="11" idx="3"/>
+            <a:endCxn id="90" idx="1"/>
+          </p:cNvCxnSpPr>
+          <p:nvPr/>
+        </p:nvCxnSpPr>
+        <p:spPr>
+          <a:xfrm flipV="1">
+            <a:off x="3619232" y="3306807"/>
+            <a:ext cx="767876" cy="116752"/>
+          </a:xfrm>
+          <a:prstGeom prst="curvedConnector3">
+            <a:avLst>
+              <a:gd name="adj1" fmla="val 50000"/>
+            </a:avLst>
+          </a:prstGeom>
+          <a:ln>
+            <a:tailEnd type="triangle"/>
+          </a:ln>
+        </p:spPr>
+        <p:style>
+          <a:lnRef idx="1">
+            <a:schemeClr val="accent1"/>
+          </a:lnRef>
+          <a:fillRef idx="0">
+            <a:schemeClr val="accent1"/>
+          </a:fillRef>
+          <a:effectRef idx="0">
+            <a:schemeClr val="accent1"/>
+          </a:effectRef>
+          <a:fontRef idx="minor">
+            <a:schemeClr val="tx1"/>
+          </a:fontRef>
+        </p:style>
+      </p:cxnSp>
+      <p:sp>
+        <p:nvSpPr>
+          <p:cNvPr id="133" name="TextBox 132"/>
+          <p:cNvSpPr txBox="1"/>
+          <p:nvPr/>
+        </p:nvSpPr>
+        <p:spPr>
+          <a:xfrm>
+            <a:off x="1728787" y="161126"/>
+            <a:ext cx="1115947" cy="307777"/>
+          </a:xfrm>
+          <a:prstGeom prst="rect">
+            <a:avLst/>
+          </a:prstGeom>
+          <a:noFill/>
+        </p:spPr>
+        <p:txBody>
+          <a:bodyPr wrap="none" rtlCol="0">
+            <a:spAutoFit/>
+          </a:bodyPr>
+          <a:lstStyle/>
+          <a:p>
+            <a:r>
+              <a:rPr lang="en-US" sz="1400" dirty="0" smtClean="0"/>
+              <a:t>Components</a:t>
+            </a:r>
+            <a:endParaRPr lang="en-IN" sz="1400" dirty="0"/>
+          </a:p>
+        </p:txBody>
+      </p:sp>
+      <p:sp>
+        <p:nvSpPr>
+          <p:cNvPr id="56" name="TextBox 55"/>
+          <p:cNvSpPr txBox="1"/>
+          <p:nvPr/>
+        </p:nvSpPr>
+        <p:spPr>
+          <a:xfrm>
+            <a:off x="7081129" y="1199279"/>
+            <a:ext cx="688009" cy="338554"/>
+          </a:xfrm>
+          <a:prstGeom prst="rect">
+            <a:avLst/>
+          </a:prstGeom>
+          <a:noFill/>
+        </p:spPr>
+        <p:txBody>
+          <a:bodyPr wrap="none" rtlCol="0">
+            <a:spAutoFit/>
+          </a:bodyPr>
+          <a:lstStyle/>
+          <a:p>
+            <a:r>
+              <a:rPr lang="en-US" sz="1600" b="1" dirty="0" smtClean="0"/>
+              <a:t>Cache</a:t>
+            </a:r>
+            <a:endParaRPr lang="en-IN" sz="1600" b="1" dirty="0"/>
+          </a:p>
+        </p:txBody>
+      </p:sp>
+      <p:sp>
+        <p:nvSpPr>
+          <p:cNvPr id="57" name="TextBox 56"/>
+          <p:cNvSpPr txBox="1"/>
+          <p:nvPr/>
+        </p:nvSpPr>
+        <p:spPr>
+          <a:xfrm>
+            <a:off x="8629063" y="1208823"/>
+            <a:ext cx="1103892" cy="338554"/>
+          </a:xfrm>
+          <a:prstGeom prst="rect">
+            <a:avLst/>
+          </a:prstGeom>
+          <a:noFill/>
+        </p:spPr>
+        <p:txBody>
+          <a:bodyPr wrap="none" rtlCol="0">
+            <a:spAutoFit/>
+          </a:bodyPr>
+          <a:lstStyle/>
+          <a:p>
+            <a:r>
+              <a:rPr lang="en-US" sz="1600" b="1" dirty="0" smtClean="0"/>
+              <a:t>Repository</a:t>
+            </a:r>
+            <a:endParaRPr lang="en-IN" sz="1600" b="1" dirty="0"/>
+          </a:p>
+        </p:txBody>
+      </p:sp>
+      <p:sp>
+        <p:nvSpPr>
+          <p:cNvPr id="58" name="Rectangle 57"/>
+          <p:cNvSpPr/>
+          <p:nvPr/>
+        </p:nvSpPr>
+        <p:spPr>
+          <a:xfrm>
+            <a:off x="8618684" y="2707531"/>
+            <a:ext cx="1210185" cy="897570"/>
+          </a:xfrm>
+          <a:prstGeom prst="rect">
+            <a:avLst/>
+          </a:prstGeom>
+        </p:spPr>
+        <p:style>
+          <a:lnRef idx="2">
+            <a:schemeClr val="accent5">
+              <a:shade val="50000"/>
+            </a:schemeClr>
+          </a:lnRef>
+          <a:fillRef idx="1">
+            <a:schemeClr val="accent5"/>
+          </a:fillRef>
+          <a:effectRef idx="0">
+            <a:schemeClr val="accent5"/>
+          </a:effectRef>
+          <a:fontRef idx="minor">
+            <a:schemeClr val="lt1"/>
+          </a:fontRef>
+        </p:style>
+        <p:txBody>
+          <a:bodyPr rtlCol="0" anchor="ctr"/>
+          <a:lstStyle/>
+          <a:p>
+            <a:pPr algn="ctr"/>
+            <a:r>
+              <a:rPr lang="en-US" sz="1400" dirty="0" smtClean="0"/>
+              <a:t>Repository with Dapper ORM</a:t>
+            </a:r>
+            <a:endParaRPr lang="en-IN" sz="1400" dirty="0"/>
+          </a:p>
+        </p:txBody>
+      </p:sp>
+      <p:cxnSp>
+        <p:nvCxnSpPr>
+          <p:cNvPr id="72" name="Curved Connector 71"/>
+          <p:cNvCxnSpPr>
+            <a:stCxn id="58" idx="3"/>
+            <a:endCxn id="15" idx="2"/>
+          </p:cNvCxnSpPr>
+          <p:nvPr/>
+        </p:nvCxnSpPr>
+        <p:spPr>
+          <a:xfrm flipV="1">
+            <a:off x="9828869" y="3129897"/>
+            <a:ext cx="527594" cy="26419"/>
+          </a:xfrm>
+          <a:prstGeom prst="curvedConnector3">
+            <a:avLst>
+              <a:gd name="adj1" fmla="val 50000"/>
+            </a:avLst>
+          </a:prstGeom>
+          <a:ln>
+            <a:tailEnd type="triangle"/>
+          </a:ln>
+        </p:spPr>
+        <p:style>
+          <a:lnRef idx="1">
+            <a:schemeClr val="accent1"/>
+          </a:lnRef>
+          <a:fillRef idx="0">
+            <a:schemeClr val="accent1"/>
+          </a:fillRef>
+          <a:effectRef idx="0">
+            <a:schemeClr val="accent1"/>
+          </a:effectRef>
+          <a:fontRef idx="minor">
+            <a:schemeClr val="tx1"/>
+          </a:fontRef>
+        </p:style>
+      </p:cxnSp>
+      <p:cxnSp>
+        <p:nvCxnSpPr>
+          <p:cNvPr id="78" name="Straight Connector 77"/>
+          <p:cNvCxnSpPr/>
+          <p:nvPr/>
+        </p:nvCxnSpPr>
+        <p:spPr>
+          <a:xfrm>
+            <a:off x="8410525" y="1208823"/>
+            <a:ext cx="0" cy="4824000"/>
+          </a:xfrm>
+          <a:prstGeom prst="line">
+            <a:avLst/>
+          </a:prstGeom>
+          <a:ln w="28575">
+            <a:prstDash val="sysDash"/>
+          </a:ln>
+        </p:spPr>
+        <p:style>
+          <a:lnRef idx="1">
+            <a:schemeClr val="accent1"/>
+          </a:lnRef>
+          <a:fillRef idx="0">
+            <a:schemeClr val="accent1"/>
+          </a:fillRef>
+          <a:effectRef idx="0">
+            <a:schemeClr val="accent1"/>
+          </a:effectRef>
+          <a:fontRef idx="minor">
+            <a:schemeClr val="tx1"/>
+          </a:fontRef>
+        </p:style>
+      </p:cxnSp>
+      <p:cxnSp>
+        <p:nvCxnSpPr>
+          <p:cNvPr id="79" name="Straight Connector 78"/>
+          <p:cNvCxnSpPr/>
+          <p:nvPr/>
+        </p:nvCxnSpPr>
+        <p:spPr>
+          <a:xfrm>
+            <a:off x="9995485" y="1208823"/>
+            <a:ext cx="0" cy="4824000"/>
+          </a:xfrm>
+          <a:prstGeom prst="line">
+            <a:avLst/>
+          </a:prstGeom>
+          <a:ln w="28575">
+            <a:prstDash val="sysDash"/>
+          </a:ln>
+        </p:spPr>
+        <p:style>
+          <a:lnRef idx="1">
+            <a:schemeClr val="accent1"/>
+          </a:lnRef>
+          <a:fillRef idx="0">
+            <a:schemeClr val="accent1"/>
+          </a:fillRef>
+          <a:effectRef idx="0">
+            <a:schemeClr val="accent1"/>
+          </a:effectRef>
+          <a:fontRef idx="minor">
+            <a:schemeClr val="tx1"/>
+          </a:fontRef>
+        </p:style>
+      </p:cxnSp>
+    </p:spTree>
+    <p:extLst>
+      <p:ext uri="{BB962C8B-B14F-4D97-AF65-F5344CB8AC3E}">
+        <p14:creationId xmlns:p14="http://schemas.microsoft.com/office/powerpoint/2010/main" val="985932527"/>
+      </p:ext>
+    </p:extLst>
+  </p:cSld>
+  <p:clrMapOvr>
+    <a:masterClrMapping/>
+  </p:clrMapOvr>
+  <p:timing>
+    <p:tnLst>
+      <p:par>
+        <p:cTn id="1" dur="indefinite" restart="never" nodeType="tmRoot"/>
+      </p:par>
+    </p:tnLst>
+  </p:timing>
+</p:sld>
+</file>
+
+<file path=ppt/slides/slide4.xml><?xml version="1.0" encoding="utf-8"?>
+<p:sld xmlns:a="http://schemas.openxmlformats.org/drawingml/2006/main" xmlns:r="http://schemas.openxmlformats.org/officeDocument/2006/relationships" xmlns:p="http://schemas.openxmlformats.org/presentationml/2006/main">
+  <p:cSld>
+    <p:spTree>
+      <p:nvGrpSpPr>
+        <p:cNvPr id="1" name=""/>
+        <p:cNvGrpSpPr/>
+        <p:nvPr/>
+      </p:nvGrpSpPr>
+      <p:grpSpPr>
+        <a:xfrm>
+          <a:off x="0" y="0"/>
+          <a:ext cx="0" cy="0"/>
+          <a:chOff x="0" y="0"/>
+          <a:chExt cx="0" cy="0"/>
+        </a:xfrm>
+      </p:grpSpPr>
+      <p:cxnSp>
+        <p:nvCxnSpPr>
+          <p:cNvPr id="5" name="Straight Connector 4"/>
+          <p:cNvCxnSpPr/>
+          <p:nvPr/>
+        </p:nvCxnSpPr>
+        <p:spPr>
           <a:xfrm flipH="1">
             <a:off x="3829050" y="1217402"/>
             <a:ext cx="8663" cy="4840498"/>
@@ -8569,7 +10254,7 @@
     </p:spTree>
     <p:extLst>
       <p:ext uri="{BB962C8B-B14F-4D97-AF65-F5344CB8AC3E}">
-        <p14:creationId xmlns:p14="http://schemas.microsoft.com/office/powerpoint/2010/main" val="985932527"/>
+        <p14:creationId xmlns:p14="http://schemas.microsoft.com/office/powerpoint/2010/main" val="1435773091"/>
       </p:ext>
     </p:extLst>
   </p:cSld>
@@ -8586,7 +10271,7 @@
 </p:sld>
 </file>
 
-<file path=ppt/slides/slide3.xml><?xml version="1.0" encoding="utf-8"?>
+<file path=ppt/slides/slide5.xml><?xml version="1.0" encoding="utf-8"?>
 <p:sld xmlns:a="http://schemas.openxmlformats.org/drawingml/2006/main" xmlns:r="http://schemas.openxmlformats.org/officeDocument/2006/relationships" xmlns:p="http://schemas.openxmlformats.org/presentationml/2006/main">
   <p:cSld>
     <p:spTree>
@@ -12609,7 +14294,7 @@
 </p:sld>
 </file>
 
-<file path=ppt/slides/slide4.xml><?xml version="1.0" encoding="utf-8"?>
+<file path=ppt/slides/slide6.xml><?xml version="1.0" encoding="utf-8"?>
 <p:sld xmlns:a="http://schemas.openxmlformats.org/drawingml/2006/main" xmlns:r="http://schemas.openxmlformats.org/officeDocument/2006/relationships" xmlns:p="http://schemas.openxmlformats.org/presentationml/2006/main">
   <p:cSld>
     <p:spTree>
